--- a/templates/36-prototyping-template.pptx
+++ b/templates/36-prototyping-template.pptx
@@ -3558,7 +3558,7 @@
         <p:spPr>
           <a:xfrm>
             <a:off x="457200" y="1207008"/>
-            <a:ext cx="2743200" cy="182880"/>
+            <a:ext cx="11277295" cy="274320"/>
           </a:xfrm>
           <a:prstGeom prst="rect">
             <a:avLst/>
@@ -3574,13 +3574,13 @@
           <a:p>
             <a:pPr algn="l"/>
             <a:r>
-              <a:rPr lang="en-AU" sz="800" b="1" dirty="0">
+              <a:rPr lang="en-AU" sz="1250" b="1" dirty="0">
                 <a:solidFill>
-                  <a:srgbClr val="6B6A66"/>
+                  <a:srgbClr val="184F95"/>
                 </a:solidFill>
                 <a:latin typeface="Aptos"/>
               </a:rPr>
-              <a:t>HOW TO FILL IT IN</a:t>
+              <a:t>Prototyping — blank template</a:t>
             </a:r>
           </a:p>
         </p:txBody>
@@ -3593,8 +3593,8 @@
         </p:nvSpPr>
         <p:spPr>
           <a:xfrm>
-            <a:off x="457200" y="1408176"/>
-            <a:ext cx="2743200" cy="914400"/>
+            <a:off x="457200" y="6089904"/>
+            <a:ext cx="11277295" cy="347472"/>
           </a:xfrm>
           <a:prstGeom prst="rect">
             <a:avLst/>
@@ -3610,275 +3610,27 @@
           <a:p>
             <a:pPr algn="l"/>
             <a:r>
-              <a:rPr lang="en-AU" sz="950" dirty="0">
-                <a:solidFill>
-                  <a:srgbClr val="0B0B0B"/>
-                </a:solidFill>
-                <a:latin typeface="Aptos"/>
-              </a:rPr>
-              <a:t>Record what can go wrong at each step underneath, not only the path where everything works.</a:t>
-            </a:r>
-          </a:p>
-        </p:txBody>
-      </p:sp>
-      <p:sp>
-        <p:nvSpPr>
-          <p:cNvPr id="33" name="shape33"/>
-          <p:cNvSpPr/>
-          <p:nvPr/>
-        </p:nvSpPr>
-        <p:spPr>
-          <a:xfrm>
-            <a:off x="457200" y="2414016"/>
-            <a:ext cx="2743200" cy="182880"/>
-          </a:xfrm>
-          <a:prstGeom prst="rect">
-            <a:avLst/>
-          </a:prstGeom>
-          <a:noFill/>
-          <a:ln>
-            <a:noFill/>
-          </a:ln>
-        </p:spPr>
-        <p:txBody>
-          <a:bodyPr wrap="square" anchor="b" lIns="0" rIns="0" tIns="27432" bIns="27432"/>
-          <a:lstStyle/>
-          <a:p>
-            <a:pPr algn="l"/>
-            <a:r>
-              <a:rPr lang="en-AU" sz="800" b="1" dirty="0">
+              <a:rPr lang="en-AU" sz="850" dirty="0">
                 <a:solidFill>
                   <a:srgbClr val="6B6A66"/>
                 </a:solidFill>
                 <a:latin typeface="Aptos"/>
               </a:rPr>
-              <a:t>WHAT IT IS FOR</a:t>
-            </a:r>
-          </a:p>
-        </p:txBody>
-      </p:sp>
-      <p:sp>
-        <p:nvSpPr>
-          <p:cNvPr id="34" name="shape34"/>
+              <a:t>Record what can go wrong at each step underneath, not only the path where everything works.</a:t>
+            </a:r>
+          </a:p>
+        </p:txBody>
+      </p:sp>
+      <p:sp>
+        <p:nvSpPr>
+          <p:cNvPr id="33" name="shape33"/>
           <p:cNvSpPr/>
           <p:nvPr/>
         </p:nvSpPr>
         <p:spPr>
           <a:xfrm>
-            <a:off x="457200" y="2615184"/>
-            <a:ext cx="2743200" cy="731520"/>
-          </a:xfrm>
-          <a:prstGeom prst="rect">
-            <a:avLst/>
-          </a:prstGeom>
-          <a:noFill/>
-          <a:ln>
-            <a:noFill/>
-          </a:ln>
-        </p:spPr>
-        <p:txBody>
-          <a:bodyPr wrap="square" anchor="t" lIns="0" rIns="0" tIns="27432" bIns="27432"/>
-          <a:lstStyle/>
-          <a:p>
-            <a:pPr algn="l"/>
-            <a:r>
-              <a:rPr lang="en-AU" sz="950" dirty="0">
-                <a:solidFill>
-                  <a:srgbClr val="0B0B0B"/>
-                </a:solidFill>
-                <a:latin typeface="Aptos"/>
-              </a:rPr>
-              <a:t>Makes an early, partial version of the solution so stakeholders can react to something concrete instead of describing something abstract.</a:t>
-            </a:r>
-          </a:p>
-        </p:txBody>
-      </p:sp>
-      <p:sp>
-        <p:nvSpPr>
-          <p:cNvPr id="35" name="shape35"/>
-          <p:cNvSpPr/>
-          <p:nvPr/>
-        </p:nvSpPr>
-        <p:spPr>
-          <a:xfrm>
-            <a:off x="457200" y="3438144"/>
-            <a:ext cx="2743200" cy="182880"/>
-          </a:xfrm>
-          <a:prstGeom prst="rect">
-            <a:avLst/>
-          </a:prstGeom>
-          <a:noFill/>
-          <a:ln>
-            <a:noFill/>
-          </a:ln>
-        </p:spPr>
-        <p:txBody>
-          <a:bodyPr wrap="square" anchor="b" lIns="0" rIns="0" tIns="27432" bIns="27432"/>
-          <a:lstStyle/>
-          <a:p>
-            <a:pPr algn="l"/>
-            <a:r>
-              <a:rPr lang="en-AU" sz="800" b="1" dirty="0">
-                <a:solidFill>
-                  <a:srgbClr val="6B6A66"/>
-                </a:solidFill>
-                <a:latin typeface="Aptos"/>
-              </a:rPr>
-              <a:t>MOST OFTEN CONFUSED WITH</a:t>
-            </a:r>
-          </a:p>
-        </p:txBody>
-      </p:sp>
-      <p:sp>
-        <p:nvSpPr>
-          <p:cNvPr id="36" name="shape36"/>
-          <p:cNvSpPr/>
-          <p:nvPr/>
-        </p:nvSpPr>
-        <p:spPr>
-          <a:xfrm>
-            <a:off x="457200" y="3639312"/>
-            <a:ext cx="2743200" cy="1737360"/>
-          </a:xfrm>
-          <a:prstGeom prst="rect">
-            <a:avLst/>
-          </a:prstGeom>
-          <a:solidFill>
-            <a:srgbClr val="F7F7F5"/>
-          </a:solidFill>
-          <a:ln>
-            <a:noFill/>
-          </a:ln>
-        </p:spPr>
-        <p:txBody>
-          <a:bodyPr wrap="square" anchor="t" lIns="91440" rIns="91440" tIns="27432" bIns="27432"/>
-          <a:lstStyle/>
-          <a:p>
-            <a:pPr algn="l"/>
-            <a:r>
-              <a:rPr lang="en-AU" sz="900" dirty="0">
-                <a:solidFill>
-                  <a:srgbClr val="0B0B0B"/>
-                </a:solidFill>
-                <a:latin typeface="Aptos"/>
-              </a:rPr>
-              <a:t>A prototype elicits and validates; it is not the solution and not a design specification. Items where the prototype quietly becomes the build are testing whether you know the difference between throwaway and evolutionary intent.</a:t>
-            </a:r>
-          </a:p>
-        </p:txBody>
-      </p:sp>
-      <p:sp>
-        <p:nvSpPr>
-          <p:cNvPr id="37" name="shape37"/>
-          <p:cNvSpPr/>
-          <p:nvPr/>
-        </p:nvSpPr>
-        <p:spPr>
-          <a:xfrm>
-            <a:off x="457200" y="3639312"/>
-            <a:ext cx="32004" cy="1737360"/>
-          </a:xfrm>
-          <a:prstGeom prst="rect">
-            <a:avLst/>
-          </a:prstGeom>
-          <a:solidFill>
-            <a:srgbClr val="FAB219"/>
-          </a:solidFill>
-          <a:ln>
-            <a:noFill/>
-          </a:ln>
-        </p:spPr>
-        <p:txBody>
-          <a:bodyPr wrap="square" anchor="ctr" lIns="54864" rIns="54864" tIns="27432" bIns="27432"/>
-          <a:lstStyle/>
-          <a:p>
-            <a:pPr algn="l"/>
-            <a:endParaRPr lang="en-AU" sz="1100"/>
-          </a:p>
-        </p:txBody>
-      </p:sp>
-      <p:sp>
-        <p:nvSpPr>
-          <p:cNvPr id="38" name="shape38"/>
-          <p:cNvSpPr/>
-          <p:nvPr/>
-        </p:nvSpPr>
-        <p:spPr>
-          <a:xfrm>
-            <a:off x="457200" y="5486400"/>
-            <a:ext cx="2743200" cy="502920"/>
-          </a:xfrm>
-          <a:prstGeom prst="rect">
-            <a:avLst/>
-          </a:prstGeom>
-          <a:noFill/>
-          <a:ln>
-            <a:noFill/>
-          </a:ln>
-        </p:spPr>
-        <p:txBody>
-          <a:bodyPr wrap="square" anchor="t" lIns="0" rIns="0" tIns="27432" bIns="27432"/>
-          <a:lstStyle/>
-          <a:p>
-            <a:pPr algn="l"/>
-            <a:r>
-              <a:rPr lang="en-AU" sz="800" dirty="0">
-                <a:solidFill>
-                  <a:srgbClr val="6B6A66"/>
-                </a:solidFill>
-                <a:latin typeface="Aptos"/>
-              </a:rPr>
-              <a:t>Tasks: 4.2 Conduct Elicitation · 7.5 Define Design Options · 7.3 Validate Requirements</a:t>
-            </a:r>
-          </a:p>
-        </p:txBody>
-      </p:sp>
-      <p:sp>
-        <p:nvSpPr>
-          <p:cNvPr id="39" name="shape39"/>
-          <p:cNvSpPr/>
-          <p:nvPr/>
-        </p:nvSpPr>
-        <p:spPr>
-          <a:xfrm>
-            <a:off x="3520440" y="1188720"/>
-            <a:ext cx="8214055" cy="237744"/>
-          </a:xfrm>
-          <a:prstGeom prst="rect">
-            <a:avLst/>
-          </a:prstGeom>
-          <a:noFill/>
-          <a:ln>
-            <a:noFill/>
-          </a:ln>
-        </p:spPr>
-        <p:txBody>
-          <a:bodyPr wrap="square" anchor="b" lIns="0" rIns="0" tIns="27432" bIns="27432"/>
-          <a:lstStyle/>
-          <a:p>
-            <a:pPr algn="l"/>
-            <a:r>
-              <a:rPr lang="en-AU" sz="1050" b="1" dirty="0">
-                <a:solidFill>
-                  <a:srgbClr val="184F95"/>
-                </a:solidFill>
-                <a:latin typeface="Aptos"/>
-              </a:rPr>
-              <a:t>Prototyping — blank template</a:t>
-            </a:r>
-          </a:p>
-        </p:txBody>
-      </p:sp>
-      <p:sp>
-        <p:nvSpPr>
-          <p:cNvPr id="40" name="shape40"/>
-          <p:cNvSpPr/>
-          <p:nvPr/>
-        </p:nvSpPr>
-        <p:spPr>
-          <a:xfrm>
-            <a:off x="3520440" y="1499616"/>
-            <a:ext cx="1902638" cy="1371600"/>
+            <a:off x="457200" y="1700784"/>
+            <a:ext cx="2668448" cy="1371600"/>
           </a:xfrm>
           <a:prstGeom prst="roundRect">
             <a:avLst>
@@ -3925,13 +3677,13 @@
       </p:sp>
       <p:cxnSp>
         <p:nvCxnSpPr>
-          <p:cNvPr id="41" name="conn41"/>
+          <p:cNvPr id="34" name="conn34"/>
           <p:cNvCxnSpPr/>
           <p:nvPr/>
         </p:nvCxnSpPr>
         <p:spPr>
           <a:xfrm>
-            <a:off x="5441366" y="2185416"/>
+            <a:off x="3143936" y="2386584"/>
             <a:ext cx="164592" cy="1"/>
           </a:xfrm>
           <a:prstGeom prst="line">
@@ -3947,14 +3699,14 @@
       </p:cxnSp>
       <p:sp>
         <p:nvSpPr>
-          <p:cNvPr id="42" name="shape42"/>
+          <p:cNvPr id="35" name="shape35"/>
           <p:cNvSpPr/>
           <p:nvPr/>
         </p:nvSpPr>
         <p:spPr>
           <a:xfrm>
-            <a:off x="5624246" y="1499616"/>
-            <a:ext cx="1902638" cy="1371600"/>
+            <a:off x="3326816" y="1700784"/>
+            <a:ext cx="2668448" cy="1371600"/>
           </a:xfrm>
           <a:prstGeom prst="roundRect">
             <a:avLst>
@@ -4001,13 +3753,13 @@
       </p:sp>
       <p:cxnSp>
         <p:nvCxnSpPr>
-          <p:cNvPr id="43" name="conn43"/>
+          <p:cNvPr id="36" name="conn36"/>
           <p:cNvCxnSpPr/>
           <p:nvPr/>
         </p:nvCxnSpPr>
         <p:spPr>
           <a:xfrm>
-            <a:off x="7545172" y="2185416"/>
+            <a:off x="6013552" y="2386584"/>
             <a:ext cx="164592" cy="1"/>
           </a:xfrm>
           <a:prstGeom prst="line">
@@ -4023,14 +3775,14 @@
       </p:cxnSp>
       <p:sp>
         <p:nvSpPr>
-          <p:cNvPr id="44" name="shape44"/>
+          <p:cNvPr id="37" name="shape37"/>
           <p:cNvSpPr/>
           <p:nvPr/>
         </p:nvSpPr>
         <p:spPr>
           <a:xfrm>
-            <a:off x="7728052" y="1499616"/>
-            <a:ext cx="1902638" cy="1371600"/>
+            <a:off x="6196432" y="1700784"/>
+            <a:ext cx="2668448" cy="1371600"/>
           </a:xfrm>
           <a:prstGeom prst="roundRect">
             <a:avLst>
@@ -4077,13 +3829,13 @@
       </p:sp>
       <p:cxnSp>
         <p:nvCxnSpPr>
-          <p:cNvPr id="45" name="conn45"/>
+          <p:cNvPr id="38" name="conn38"/>
           <p:cNvCxnSpPr/>
           <p:nvPr/>
         </p:nvCxnSpPr>
         <p:spPr>
           <a:xfrm>
-            <a:off x="9648977" y="2185416"/>
+            <a:off x="8883167" y="2386584"/>
             <a:ext cx="164592" cy="1"/>
           </a:xfrm>
           <a:prstGeom prst="line">
@@ -4099,14 +3851,14 @@
       </p:cxnSp>
       <p:sp>
         <p:nvSpPr>
-          <p:cNvPr id="46" name="shape46"/>
+          <p:cNvPr id="39" name="shape39"/>
           <p:cNvSpPr/>
           <p:nvPr/>
         </p:nvSpPr>
         <p:spPr>
           <a:xfrm>
-            <a:off x="9831857" y="1499616"/>
-            <a:ext cx="1902638" cy="1371600"/>
+            <a:off x="9066047" y="1700784"/>
+            <a:ext cx="2668448" cy="1371600"/>
           </a:xfrm>
           <a:prstGeom prst="roundRect">
             <a:avLst>
